--- a/templates/SH_Candidate_Update_Report_TEMPLATE.pptx
+++ b/templates/SH_Candidate_Update_Report_TEMPLATE.pptx
@@ -6495,7 +6495,38 @@
           <a:bodyPr/>
           <a:lstStyle/>
           <a:p>
-            <a:endParaRPr lang="en-IN" dirty="0"/>
+            <a:endParaRPr lang="en-US" sz="800" dirty="0">
+              <a:solidFill>
+                <a:srgbClr val="999999"/>
+              </a:solidFill>
+              <a:latin typeface="Arial" pitchFamily="34" charset="0"/>
+              <a:ea typeface="Arial" pitchFamily="34" charset="-122"/>
+              <a:cs typeface="Arial" pitchFamily="34" charset="-120"/>
+            </a:endParaRPr>
+          </a:p>
+          <a:p>
+            <a:endParaRPr lang="en-US" sz="800" dirty="0">
+              <a:solidFill>
+                <a:srgbClr val="999999"/>
+              </a:solidFill>
+              <a:latin typeface="Arial" pitchFamily="34" charset="0"/>
+              <a:ea typeface="Arial" pitchFamily="34" charset="-122"/>
+              <a:cs typeface="Arial" pitchFamily="34" charset="-120"/>
+            </a:endParaRPr>
+          </a:p>
+          <a:p>
+            <a:r>
+              <a:rPr lang="en-US" sz="800" dirty="0">
+                <a:solidFill>
+                  <a:srgbClr val="999999"/>
+                </a:solidFill>
+                <a:latin typeface="Arial" pitchFamily="34" charset="0"/>
+                <a:ea typeface="Arial" pitchFamily="34" charset="-122"/>
+                <a:cs typeface="Arial" pitchFamily="34" charset="-120"/>
+              </a:rPr>
+              <a:t>      Photo</a:t>
+            </a:r>
+            <a:endParaRPr lang="en-IN" sz="800" dirty="0"/>
           </a:p>
         </p:txBody>
       </p:sp>
@@ -6886,7 +6917,7 @@
                 <a:ea typeface="Arial" pitchFamily="34" charset="-122"/>
                 <a:cs typeface="Arial" pitchFamily="34" charset="-120"/>
               </a:rPr>
-              <a:t>3  |  [Client] - [Role] – [Report Title]</a:t>
+              <a:t>  |  [Client] - [Role] – [Report Title]</a:t>
             </a:r>
             <a:endParaRPr lang="en-US" sz="1000" dirty="0">
               <a:solidFill>
